--- a/curso/pptx/S74.pptx
+++ b/curso/pptx/S74.pptx
@@ -8126,7 +8126,7 @@
                           </a:solidFill>
                           <a:latin typeface="Nunito Sans"/>
                         </a:rPr>
-                        <a:t>no es justo para quien ha estudiado</a:t>
+                        <a:t>sería injusto aunque ninguna norma lo prohibiera</a:t>
                       </a:r>
                     </a:p>
                   </a:txBody>

--- a/curso/pptx/S74.pptx
+++ b/curso/pptx/S74.pptx
@@ -3801,7 +3801,7 @@
                 </a:solidFill>
                 <a:latin typeface="Nunito Sans"/>
               </a:rPr>
-              <a:t>Omar ha dejado el fútbol por el dibujo y ahora va con otra cuadrilla. Un amigo le dice: «Has cambiado. Ya no eres tú». (Ejemplo inventado.)</a:t>
+              <a:t>Un chico ha dejado el fútbol por el dibujo y ahora va con otra cuadrilla. Un amigo le dice: «Has cambiado. Ya no eres tú». (Ejemplo inventado.)</a:t>
             </a:r>
           </a:p>
         </p:txBody>
@@ -3849,7 +3849,7 @@
                 </a:solidFill>
                 <a:latin typeface="Nunito Sans"/>
               </a:rPr>
-              <a:t>Es verdad que Omar ha cambiado: gustos y amigos.</a:t>
+              <a:t>Es verdad que ese chico ha cambiado: gustos y amigos.</a:t>
             </a:r>
           </a:p>
           <a:p>
@@ -4437,7 +4437,7 @@
                 </a:solidFill>
                 <a:latin typeface="Nunito Sans"/>
               </a:rPr>
-              <a:t>Ante el dilema de Heinz, Aitor responde que Heinz debe robar la medicina. Naiara responde que no debe robarla.</a:t>
+              <a:t>Ante el dilema de Heinz, un chico responde que Heinz debe robar la medicina. Una chica responde que no debe robarla.</a:t>
             </a:r>
           </a:p>
         </p:txBody>
@@ -4485,7 +4485,7 @@
                 </a:solidFill>
                 <a:latin typeface="Nunito Sans"/>
               </a:rPr>
-              <a:t>¿Aitor, que quiere salvar una vida, razona en un nivel más alto?</a:t>
+              <a:t>¿El chico, que quiere salvar una vida, razona en un nivel más alto?</a:t>
             </a:r>
           </a:p>
           <a:p>
@@ -4535,7 +4535,7 @@
                 </a:solidFill>
                 <a:latin typeface="Nunito Sans"/>
               </a:rPr>
-              <a:t>Pero Aitor explica: «Debe robar, porque si ella muere, él se queda solo». Solo mira lo que le conviene: nivel 1.</a:t>
+              <a:t>Pero el chico explica: «Debe robar, porque si ella muere, él se queda solo». Solo mira lo que le conviene: nivel 1.</a:t>
             </a:r>
           </a:p>
           <a:p>
@@ -4560,7 +4560,7 @@
                 </a:solidFill>
                 <a:latin typeface="Nunito Sans"/>
               </a:rPr>
-              <a:t>Naiara explica: «No, porque la ley es igual para todos». Piensa en las normas: nivel 2.</a:t>
+              <a:t>La chica explica: «No, porque la ley es igual para todos». Piensa en las normas: nivel 2.</a:t>
             </a:r>
           </a:p>
           <a:p>
